--- a/deliverables/Claim2Value_pitch.pptx
+++ b/deliverables/Claim2Value_pitch.pptx
@@ -1833,13 +1833,6 @@
 <file path=ppt/slides/slide1.xml><?xml version="1.0" encoding="utf-8"?>
 <p:sld xmlns:a="http://schemas.openxmlformats.org/drawingml/2006/main" xmlns:r="http://schemas.openxmlformats.org/officeDocument/2006/relationships" xmlns:p="http://schemas.openxmlformats.org/presentationml/2006/main">
   <p:cSld name="Slide 1">
-    <p:bg>
-      <p:bgPr>
-        <a:solidFill>
-          <a:srgbClr val="1E2761"/>
-        </a:solidFill>
-      </p:bgPr>
-    </p:bg>
     <p:spTree>
       <p:nvGrpSpPr>
         <p:cNvPr id="1" name=""/>
@@ -1889,13 +1882,6 @@
 <file path=ppt/slides/slide10.xml><?xml version="1.0" encoding="utf-8"?>
 <p:sld xmlns:a="http://schemas.openxmlformats.org/drawingml/2006/main" xmlns:r="http://schemas.openxmlformats.org/officeDocument/2006/relationships" xmlns:p="http://schemas.openxmlformats.org/presentationml/2006/main">
   <p:cSld name="Slide 10">
-    <p:bg>
-      <p:bgPr>
-        <a:solidFill>
-          <a:srgbClr val="1E2761"/>
-        </a:solidFill>
-      </p:bgPr>
-    </p:bg>
     <p:spTree>
       <p:nvGrpSpPr>
         <p:cNvPr id="1" name=""/>
@@ -1945,13 +1931,6 @@
 <file path=ppt/slides/slide11.xml><?xml version="1.0" encoding="utf-8"?>
 <p:sld xmlns:a="http://schemas.openxmlformats.org/drawingml/2006/main" xmlns:r="http://schemas.openxmlformats.org/officeDocument/2006/relationships" xmlns:p="http://schemas.openxmlformats.org/presentationml/2006/main">
   <p:cSld name="Slide 11">
-    <p:bg>
-      <p:bgPr>
-        <a:solidFill>
-          <a:srgbClr val="1E2761"/>
-        </a:solidFill>
-      </p:bgPr>
-    </p:bg>
     <p:spTree>
       <p:nvGrpSpPr>
         <p:cNvPr id="1" name=""/>
@@ -2001,13 +1980,6 @@
 <file path=ppt/slides/slide12.xml><?xml version="1.0" encoding="utf-8"?>
 <p:sld xmlns:a="http://schemas.openxmlformats.org/drawingml/2006/main" xmlns:r="http://schemas.openxmlformats.org/officeDocument/2006/relationships" xmlns:p="http://schemas.openxmlformats.org/presentationml/2006/main">
   <p:cSld name="Slide 12">
-    <p:bg>
-      <p:bgPr>
-        <a:solidFill>
-          <a:srgbClr val="1E2761"/>
-        </a:solidFill>
-      </p:bgPr>
-    </p:bg>
     <p:spTree>
       <p:nvGrpSpPr>
         <p:cNvPr id="1" name=""/>
@@ -2057,13 +2029,6 @@
 <file path=ppt/slides/slide2.xml><?xml version="1.0" encoding="utf-8"?>
 <p:sld xmlns:a="http://schemas.openxmlformats.org/drawingml/2006/main" xmlns:r="http://schemas.openxmlformats.org/officeDocument/2006/relationships" xmlns:p="http://schemas.openxmlformats.org/presentationml/2006/main">
   <p:cSld name="Slide 2">
-    <p:bg>
-      <p:bgPr>
-        <a:solidFill>
-          <a:srgbClr val="1E2761"/>
-        </a:solidFill>
-      </p:bgPr>
-    </p:bg>
     <p:spTree>
       <p:nvGrpSpPr>
         <p:cNvPr id="1" name=""/>
@@ -2113,13 +2078,6 @@
 <file path=ppt/slides/slide3.xml><?xml version="1.0" encoding="utf-8"?>
 <p:sld xmlns:a="http://schemas.openxmlformats.org/drawingml/2006/main" xmlns:r="http://schemas.openxmlformats.org/officeDocument/2006/relationships" xmlns:p="http://schemas.openxmlformats.org/presentationml/2006/main">
   <p:cSld name="Slide 3">
-    <p:bg>
-      <p:bgPr>
-        <a:solidFill>
-          <a:srgbClr val="1E2761"/>
-        </a:solidFill>
-      </p:bgPr>
-    </p:bg>
     <p:spTree>
       <p:nvGrpSpPr>
         <p:cNvPr id="1" name=""/>
@@ -2169,13 +2127,6 @@
 <file path=ppt/slides/slide4.xml><?xml version="1.0" encoding="utf-8"?>
 <p:sld xmlns:a="http://schemas.openxmlformats.org/drawingml/2006/main" xmlns:r="http://schemas.openxmlformats.org/officeDocument/2006/relationships" xmlns:p="http://schemas.openxmlformats.org/presentationml/2006/main">
   <p:cSld name="Slide 4">
-    <p:bg>
-      <p:bgPr>
-        <a:solidFill>
-          <a:srgbClr val="1E2761"/>
-        </a:solidFill>
-      </p:bgPr>
-    </p:bg>
     <p:spTree>
       <p:nvGrpSpPr>
         <p:cNvPr id="1" name=""/>
@@ -2225,13 +2176,6 @@
 <file path=ppt/slides/slide5.xml><?xml version="1.0" encoding="utf-8"?>
 <p:sld xmlns:a="http://schemas.openxmlformats.org/drawingml/2006/main" xmlns:r="http://schemas.openxmlformats.org/officeDocument/2006/relationships" xmlns:p="http://schemas.openxmlformats.org/presentationml/2006/main">
   <p:cSld name="Slide 5">
-    <p:bg>
-      <p:bgPr>
-        <a:solidFill>
-          <a:srgbClr val="1E2761"/>
-        </a:solidFill>
-      </p:bgPr>
-    </p:bg>
     <p:spTree>
       <p:nvGrpSpPr>
         <p:cNvPr id="1" name=""/>
@@ -2281,13 +2225,6 @@
 <file path=ppt/slides/slide6.xml><?xml version="1.0" encoding="utf-8"?>
 <p:sld xmlns:a="http://schemas.openxmlformats.org/drawingml/2006/main" xmlns:r="http://schemas.openxmlformats.org/officeDocument/2006/relationships" xmlns:p="http://schemas.openxmlformats.org/presentationml/2006/main">
   <p:cSld name="Slide 6">
-    <p:bg>
-      <p:bgPr>
-        <a:solidFill>
-          <a:srgbClr val="1E2761"/>
-        </a:solidFill>
-      </p:bgPr>
-    </p:bg>
     <p:spTree>
       <p:nvGrpSpPr>
         <p:cNvPr id="1" name=""/>
@@ -2337,13 +2274,6 @@
 <file path=ppt/slides/slide7.xml><?xml version="1.0" encoding="utf-8"?>
 <p:sld xmlns:a="http://schemas.openxmlformats.org/drawingml/2006/main" xmlns:r="http://schemas.openxmlformats.org/officeDocument/2006/relationships" xmlns:p="http://schemas.openxmlformats.org/presentationml/2006/main">
   <p:cSld name="Slide 7">
-    <p:bg>
-      <p:bgPr>
-        <a:solidFill>
-          <a:srgbClr val="1E2761"/>
-        </a:solidFill>
-      </p:bgPr>
-    </p:bg>
     <p:spTree>
       <p:nvGrpSpPr>
         <p:cNvPr id="1" name=""/>
@@ -2393,13 +2323,6 @@
 <file path=ppt/slides/slide8.xml><?xml version="1.0" encoding="utf-8"?>
 <p:sld xmlns:a="http://schemas.openxmlformats.org/drawingml/2006/main" xmlns:r="http://schemas.openxmlformats.org/officeDocument/2006/relationships" xmlns:p="http://schemas.openxmlformats.org/presentationml/2006/main">
   <p:cSld name="Slide 8">
-    <p:bg>
-      <p:bgPr>
-        <a:solidFill>
-          <a:srgbClr val="1E2761"/>
-        </a:solidFill>
-      </p:bgPr>
-    </p:bg>
     <p:spTree>
       <p:nvGrpSpPr>
         <p:cNvPr id="1" name=""/>
@@ -2449,13 +2372,6 @@
 <file path=ppt/slides/slide9.xml><?xml version="1.0" encoding="utf-8"?>
 <p:sld xmlns:a="http://schemas.openxmlformats.org/drawingml/2006/main" xmlns:r="http://schemas.openxmlformats.org/officeDocument/2006/relationships" xmlns:p="http://schemas.openxmlformats.org/presentationml/2006/main">
   <p:cSld name="Slide 9">
-    <p:bg>
-      <p:bgPr>
-        <a:solidFill>
-          <a:srgbClr val="1E2761"/>
-        </a:solidFill>
-      </p:bgPr>
-    </p:bg>
     <p:spTree>
       <p:nvGrpSpPr>
         <p:cNvPr id="1" name=""/>
